--- a/docs/presentations/Adaptive_LLM_Router_Checkpoint_2_Final.pptx
+++ b/docs/presentations/Adaptive_LLM_Router_Checkpoint_2_Final.pptx
@@ -4553,7 +4553,7 @@
                 <a:ea typeface="Roboto" pitchFamily="34" charset="-122"/>
                 <a:cs typeface="Roboto" pitchFamily="34" charset="-120"/>
               </a:rPr>
-              <a:t>$0.26</a:t>
+              <a:t>$0.30</a:t>
             </a:r>
             <a:endParaRPr lang="en-US" sz="2400" dirty="0"/>
           </a:p>
